--- a/plano-de-aulas/aula-06-slides.pptx
+++ b/plano-de-aulas/aula-06-slides.pptx
@@ -3491,7 +3491,7 @@
           <a:lstStyle/>
           <a:p>
             <a:r>
-              <a:t>Tópicos / eventos com Kafka</a:t>
+              <a:t>Filas com RabbitMQ + DLQ</a:t>
             </a:r>
           </a:p>
         </p:txBody>
@@ -3512,7 +3512,7 @@
           <a:lstStyle/>
           <a:p>
             <a:r>
-              <a:t>BE-JV-010 · Aula 6 · 03/07 · Tópicos / pub-sub</a:t>
+              <a:t>BE-JV-010 · Aula 5 · 01/07 · Filas</a:t>
             </a:r>
           </a:p>
         </p:txBody>
@@ -3572,17 +3572,17 @@
           <a:lstStyle/>
           <a:p>
             <a:r>
-              <a:t>Depois de gravar, 3 áreas querem reagir: notificação, antifraude e BI.</a:t>
+              <a:t>A gravação falha de forma intermitente (banco oscila)</a:t>
             </a:r>
           </a:p>
           <a:p>
             <a:r>
-              <a:t>O gravador não pode conhecer todas.</a:t>
+              <a:t>e às vezes permanente (mensagem malformada).</a:t>
             </a:r>
           </a:p>
           <a:p>
             <a:r>
-              <a:t>Como avisar 'aconteceu' sem acoplar?</a:t>
+              <a:t>Os dois casos não podem ser tratados igual.</a:t>
             </a:r>
           </a:p>
         </p:txBody>
@@ -3659,22 +3659,22 @@
           <a:lstStyle/>
           <a:p>
             <a:r>
-              <a:t>Fila × tópico</a:t>
+              <a:t>Exchange, binding, routing key, queue</a:t>
             </a:r>
           </a:p>
           <a:p>
             <a:r>
-              <a:t>Log de eventos, offset, consumer group, partição</a:t>
+              <a:t>Tipos de exchange</a:t>
             </a:r>
           </a:p>
           <a:p>
             <a:r>
-              <a:t>Event sourcing e replay</a:t>
+              <a:t>Retry × Dead Letter Queue</a:t>
             </a:r>
           </a:p>
           <a:p>
             <a:r>
-              <a:t>Ordenação por chave</a:t>
+              <a:t>Ack/nack e redelivery no crash</a:t>
             </a:r>
           </a:p>
         </p:txBody>
@@ -3751,12 +3751,12 @@
           <a:lstStyle/>
           <a:p>
             <a:r>
-              <a:t>O 'arquivo de movimento do dia' lido por vários jobs noturnos</a:t>
+              <a:t>DLQ é a 'fila de exceção / arquivo de rejeitados' do batch</a:t>
             </a:r>
           </a:p>
           <a:p>
             <a:r>
-              <a:t>já era um log de eventos batch — Kafka é isso em streaming</a:t>
+              <a:t>agora explícita e observável</a:t>
             </a:r>
           </a:p>
         </p:txBody>
@@ -3833,17 +3833,17 @@
           <a:lstStyle/>
           <a:p>
             <a:r>
-              <a:t>Arquitetura event-driven para agentes</a:t>
+              <a:t>Work queue para jobs de IA respeitando rate limit</a:t>
             </a:r>
           </a:p>
           <a:p>
             <a:r>
-              <a:t>Event sourcing como memória reproduzível do agente</a:t>
+              <a:t>Backpressure quando o LLM é o gargalo</a:t>
             </a:r>
           </a:p>
           <a:p>
             <a:r>
-              <a:t>Streaming para ingestão/RAG contínuos</a:t>
+              <a:t>DLQ para chamadas de IA que falham (sem perda silenciosa)</a:t>
             </a:r>
           </a:p>
         </p:txBody>
@@ -3920,12 +3920,12 @@
           <a:lstStyle/>
           <a:p>
             <a:r>
-              <a:t>Base: plugar um 3º consumer group que lê desde o início</a:t>
+              <a:t>Base: configurar DLQ e provocar mensagem envenenada</a:t>
             </a:r>
           </a:p>
           <a:p>
             <a:r>
-              <a:t>Stretch: particionamento/ordenação por chave e o que quebra</a:t>
+              <a:t>Stretch: retry com backoff + idempotência sob redelivery</a:t>
             </a:r>
           </a:p>
         </p:txBody>
@@ -3981,7 +3981,7 @@
           <a:lstStyle/>
           <a:p>
             <a:r>
-              <a:t>Fila entrega trabalho; tópico publica história.</a:t>
+              <a:t>Mensagem nunca some por acidente — ou foi processada, ou está numa DLQ por decisão.</a:t>
             </a:r>
           </a:p>
         </p:txBody>
